--- a/e2e/fixtures/cjk-line-breaking.pptx
+++ b/e2e/fixtures/cjk-line-breaking.pptx
@@ -407,8 +407,8 @@
         </p:nvSpPr>
         <p:spPr>
           <a:xfrm>
-            <a:off x="762000" y="762000"/>
-            <a:ext cx="1168400" cy="2032000"/>
+            <a:off x="508000" y="381000"/>
+            <a:ext cx="1168400" cy="1397000"/>
           </a:xfrm>
           <a:prstGeom prst="rect">
             <a:avLst/>
@@ -440,8 +440,8 @@
         </p:nvSpPr>
         <p:spPr>
           <a:xfrm>
-            <a:off x="3302000" y="762000"/>
-            <a:ext cx="1168400" cy="2032000"/>
+            <a:off x="3429000" y="381000"/>
+            <a:ext cx="1168400" cy="1397000"/>
           </a:xfrm>
           <a:prstGeom prst="rect">
             <a:avLst/>
@@ -473,8 +473,8 @@
         </p:nvSpPr>
         <p:spPr>
           <a:xfrm>
-            <a:off x="5842000" y="762000"/>
-            <a:ext cx="1168400" cy="2032000"/>
+            <a:off x="6350000" y="381000"/>
+            <a:ext cx="1168400" cy="1397000"/>
           </a:xfrm>
           <a:prstGeom prst="rect">
             <a:avLst/>
@@ -494,6 +494,360 @@
                 <a:ea typeface="Yu Gothic"/>
               </a:rPr>
               <a:t>あいうえ」たちつて</a:t>
+            </a:r>
+          </a:p>
+        </p:txBody>
+      </p:sp>
+      <p:sp>
+        <p:nvSpPr>
+          <p:cNvPr id="5" name="XBREAK"/>
+          <p:cNvSpPr txBox="1"/>
+          <p:nvPr/>
+        </p:nvSpPr>
+        <p:spPr>
+          <a:xfrm>
+            <a:off x="9271000" y="381000"/>
+            <a:ext cx="1168400" cy="1397000"/>
+          </a:xfrm>
+          <a:prstGeom prst="rect">
+            <a:avLst/>
+          </a:prstGeom>
+          <a:noFill/>
+        </p:spPr>
+        <p:txBody>
+          <a:bodyPr wrap="square" lIns="0" tIns="0" rIns="0" bIns="0">
+            <a:noAutofit/>
+          </a:bodyPr>
+          <a:lstStyle/>
+          <a:p>
+            <a:pPr hangingPunct="0" eaLnBrk="0"/>
+            <a:r>
+              <a:rPr lang="ja-JP" sz="2000" dirty="0">
+                <a:latin typeface="Yu Gothic"/>
+                <a:ea typeface="Yu Gothic"/>
+              </a:rPr>
+              <a:t>まみむめ</a:t>
+            </a:r>
+            <a:r>
+              <a:rPr lang="ja-JP" sz="2000" dirty="0">
+                <a:solidFill>
+                  <a:srgbClr val="C00000"/>
+                </a:solidFill>
+                <a:latin typeface="Yu Gothic"/>
+                <a:ea typeface="Yu Gothic"/>
+              </a:rPr>
+              <a:t>」やゆよわ</a:t>
+            </a:r>
+          </a:p>
+        </p:txBody>
+      </p:sp>
+      <p:sp>
+        <p:nvSpPr>
+          <p:cNvPr id="6" name="XBREAK_KANA"/>
+          <p:cNvSpPr txBox="1"/>
+          <p:nvPr/>
+        </p:nvSpPr>
+        <p:spPr>
+          <a:xfrm>
+            <a:off x="508000" y="2413000"/>
+            <a:ext cx="1168400" cy="1397000"/>
+          </a:xfrm>
+          <a:prstGeom prst="rect">
+            <a:avLst/>
+          </a:prstGeom>
+          <a:noFill/>
+        </p:spPr>
+        <p:txBody>
+          <a:bodyPr wrap="square" lIns="0" tIns="0" rIns="0" bIns="0">
+            <a:noAutofit/>
+          </a:bodyPr>
+          <a:lstStyle/>
+          <a:p>
+            <a:pPr hangingPunct="0" eaLnBrk="0"/>
+            <a:r>
+              <a:rPr lang="ja-JP" sz="2000" dirty="0">
+                <a:latin typeface="Yu Gothic"/>
+                <a:ea typeface="Yu Gothic"/>
+              </a:rPr>
+              <a:t>さしすせ</a:t>
+            </a:r>
+            <a:r>
+              <a:rPr lang="ja-JP" sz="2000" b="1" dirty="0">
+                <a:latin typeface="Yu Gothic"/>
+                <a:ea typeface="Yu Gothic"/>
+              </a:rPr>
+              <a:t>ょそたち</a:t>
+            </a:r>
+          </a:p>
+        </p:txBody>
+      </p:sp>
+      <p:sp>
+        <p:nvSpPr>
+          <p:cNvPr id="7" name="XKINSOKU"/>
+          <p:cNvSpPr txBox="1"/>
+          <p:nvPr/>
+        </p:nvSpPr>
+        <p:spPr>
+          <a:xfrm>
+            <a:off x="3429000" y="2413000"/>
+            <a:ext cx="1168400" cy="1397000"/>
+          </a:xfrm>
+          <a:prstGeom prst="rect">
+            <a:avLst/>
+          </a:prstGeom>
+          <a:noFill/>
+        </p:spPr>
+        <p:txBody>
+          <a:bodyPr wrap="square" lIns="0" tIns="0" rIns="0" bIns="0">
+            <a:noAutofit/>
+          </a:bodyPr>
+          <a:lstStyle/>
+          <a:p>
+            <a:pPr hangingPunct="0" eaLnBrk="1"/>
+            <a:r>
+              <a:rPr lang="ja-JP" sz="2000" dirty="0">
+                <a:latin typeface="Yu Gothic"/>
+                <a:ea typeface="Yu Gothic"/>
+              </a:rPr>
+              <a:t>なにぬね</a:t>
+            </a:r>
+            <a:r>
+              <a:rPr lang="ja-JP" sz="2000" dirty="0">
+                <a:solidFill>
+                  <a:srgbClr val="C00000"/>
+                </a:solidFill>
+                <a:latin typeface="Yu Gothic"/>
+                <a:ea typeface="Yu Gothic"/>
+              </a:rPr>
+              <a:t>」はひふへ</a:t>
+            </a:r>
+          </a:p>
+        </p:txBody>
+      </p:sp>
+      <p:sp>
+        <p:nvSpPr>
+          <p:cNvPr id="8" name="XHANG_START"/>
+          <p:cNvSpPr txBox="1"/>
+          <p:nvPr/>
+        </p:nvSpPr>
+        <p:spPr>
+          <a:xfrm>
+            <a:off x="6350000" y="2413000"/>
+            <a:ext cx="1168400" cy="1397000"/>
+          </a:xfrm>
+          <a:prstGeom prst="rect">
+            <a:avLst/>
+          </a:prstGeom>
+          <a:noFill/>
+        </p:spPr>
+        <p:txBody>
+          <a:bodyPr wrap="square" lIns="0" tIns="0" rIns="0" bIns="0">
+            <a:noAutofit/>
+          </a:bodyPr>
+          <a:lstStyle/>
+          <a:p>
+            <a:pPr hangingPunct="1" eaLnBrk="1"/>
+            <a:r>
+              <a:rPr lang="ja-JP" sz="2000" dirty="0">
+                <a:latin typeface="Yu Gothic"/>
+                <a:ea typeface="Yu Gothic"/>
+              </a:rPr>
+              <a:t>らりるれ</a:t>
+            </a:r>
+            <a:r>
+              <a:rPr lang="ja-JP" sz="2000" dirty="0">
+                <a:solidFill>
+                  <a:srgbClr val="C00000"/>
+                </a:solidFill>
+                <a:latin typeface="Yu Gothic"/>
+                <a:ea typeface="Yu Gothic"/>
+              </a:rPr>
+              <a:t>。をんあい</a:t>
+            </a:r>
+          </a:p>
+        </p:txBody>
+      </p:sp>
+      <p:sp>
+        <p:nvSpPr>
+          <p:cNvPr id="9" name="XHANG_END"/>
+          <p:cNvSpPr txBox="1"/>
+          <p:nvPr/>
+        </p:nvSpPr>
+        <p:spPr>
+          <a:xfrm>
+            <a:off x="9271000" y="2413000"/>
+            <a:ext cx="1168400" cy="1397000"/>
+          </a:xfrm>
+          <a:prstGeom prst="rect">
+            <a:avLst/>
+          </a:prstGeom>
+          <a:noFill/>
+        </p:spPr>
+        <p:txBody>
+          <a:bodyPr wrap="square" lIns="0" tIns="0" rIns="0" bIns="0">
+            <a:noAutofit/>
+          </a:bodyPr>
+          <a:lstStyle/>
+          <a:p>
+            <a:pPr hangingPunct="1" eaLnBrk="1"/>
+            <a:r>
+              <a:rPr lang="ja-JP" sz="2000" dirty="0">
+                <a:latin typeface="Yu Gothic"/>
+                <a:ea typeface="Yu Gothic"/>
+              </a:rPr>
+              <a:t>がぎぐげ。</a:t>
+            </a:r>
+            <a:r>
+              <a:rPr lang="ja-JP" sz="2000" dirty="0">
+                <a:solidFill>
+                  <a:srgbClr val="C00000"/>
+                </a:solidFill>
+                <a:latin typeface="Yu Gothic"/>
+                <a:ea typeface="Yu Gothic"/>
+              </a:rPr>
+              <a:t>ざじずぜ</a:t>
+            </a:r>
+          </a:p>
+        </p:txBody>
+      </p:sp>
+      <p:sp>
+        <p:nvSpPr>
+          <p:cNvPr id="10" name="HANG_BRACKET"/>
+          <p:cNvSpPr txBox="1"/>
+          <p:nvPr/>
+        </p:nvSpPr>
+        <p:spPr>
+          <a:xfrm>
+            <a:off x="508000" y="4445000"/>
+            <a:ext cx="1168400" cy="1397000"/>
+          </a:xfrm>
+          <a:prstGeom prst="rect">
+            <a:avLst/>
+          </a:prstGeom>
+          <a:noFill/>
+        </p:spPr>
+        <p:txBody>
+          <a:bodyPr wrap="square" lIns="0" tIns="0" rIns="0" bIns="0">
+            <a:noAutofit/>
+          </a:bodyPr>
+          <a:lstStyle/>
+          <a:p>
+            <a:pPr hangingPunct="1" eaLnBrk="1"/>
+            <a:r>
+              <a:rPr lang="ja-JP" sz="2000" dirty="0">
+                <a:latin typeface="Yu Gothic"/>
+                <a:ea typeface="Yu Gothic"/>
+              </a:rPr>
+              <a:t>かきくけ。」こさし</a:t>
+            </a:r>
+          </a:p>
+        </p:txBody>
+      </p:sp>
+      <p:sp>
+        <p:nvSpPr>
+          <p:cNvPr id="11" name="HANG_TEN_BRACKET"/>
+          <p:cNvSpPr txBox="1"/>
+          <p:nvPr/>
+        </p:nvSpPr>
+        <p:spPr>
+          <a:xfrm>
+            <a:off x="3429000" y="4445000"/>
+            <a:ext cx="1168400" cy="1397000"/>
+          </a:xfrm>
+          <a:prstGeom prst="rect">
+            <a:avLst/>
+          </a:prstGeom>
+          <a:noFill/>
+        </p:spPr>
+        <p:txBody>
+          <a:bodyPr wrap="square" lIns="0" tIns="0" rIns="0" bIns="0">
+            <a:noAutofit/>
+          </a:bodyPr>
+          <a:lstStyle/>
+          <a:p>
+            <a:pPr hangingPunct="1" eaLnBrk="1"/>
+            <a:r>
+              <a:rPr lang="ja-JP" sz="2000" dirty="0">
+                <a:latin typeface="Yu Gothic"/>
+                <a:ea typeface="Yu Gothic"/>
+              </a:rPr>
+              <a:t>たちつて、」となに</a:t>
+            </a:r>
+          </a:p>
+        </p:txBody>
+      </p:sp>
+      <p:sp>
+        <p:nvSpPr>
+          <p:cNvPr id="12" name="XHANG_BRACKET"/>
+          <p:cNvSpPr txBox="1"/>
+          <p:nvPr/>
+        </p:nvSpPr>
+        <p:spPr>
+          <a:xfrm>
+            <a:off x="6350000" y="4445000"/>
+            <a:ext cx="1168400" cy="1397000"/>
+          </a:xfrm>
+          <a:prstGeom prst="rect">
+            <a:avLst/>
+          </a:prstGeom>
+          <a:noFill/>
+        </p:spPr>
+        <p:txBody>
+          <a:bodyPr wrap="square" lIns="0" tIns="0" rIns="0" bIns="0">
+            <a:noAutofit/>
+          </a:bodyPr>
+          <a:lstStyle/>
+          <a:p>
+            <a:pPr hangingPunct="1" eaLnBrk="1"/>
+            <a:r>
+              <a:rPr lang="ja-JP" sz="2000" dirty="0">
+                <a:latin typeface="Yu Gothic"/>
+                <a:ea typeface="Yu Gothic"/>
+              </a:rPr>
+              <a:t>ばびぶべ。</a:t>
+            </a:r>
+            <a:r>
+              <a:rPr lang="ja-JP" sz="2000" dirty="0">
+                <a:solidFill>
+                  <a:srgbClr val="C00000"/>
+                </a:solidFill>
+                <a:latin typeface="Yu Gothic"/>
+                <a:ea typeface="Yu Gothic"/>
+              </a:rPr>
+              <a:t>」ぼぱぴ</a:t>
+            </a:r>
+          </a:p>
+        </p:txBody>
+      </p:sp>
+      <p:sp>
+        <p:nvSpPr>
+          <p:cNvPr id="13" name="HANG_BRACKET_ANYWHERE"/>
+          <p:cNvSpPr txBox="1"/>
+          <p:nvPr/>
+        </p:nvSpPr>
+        <p:spPr>
+          <a:xfrm>
+            <a:off x="9271000" y="4445000"/>
+            <a:ext cx="1168400" cy="1397000"/>
+          </a:xfrm>
+          <a:prstGeom prst="rect">
+            <a:avLst/>
+          </a:prstGeom>
+          <a:noFill/>
+        </p:spPr>
+        <p:txBody>
+          <a:bodyPr wrap="square" lIns="0" tIns="0" rIns="0" bIns="0">
+            <a:noAutofit/>
+          </a:bodyPr>
+          <a:lstStyle/>
+          <a:p>
+            <a:pPr hangingPunct="1" eaLnBrk="0"/>
+            <a:r>
+              <a:rPr lang="ja-JP" sz="2000" dirty="0">
+                <a:latin typeface="Yu Gothic"/>
+                <a:ea typeface="Yu Gothic"/>
+              </a:rPr>
+              <a:t>はひふへ。」ほまみ</a:t>
             </a:r>
           </a:p>
         </p:txBody>
